--- a/Seasonal Agriculture Performance Analysis.pptx
+++ b/Seasonal Agriculture Performance Analysis.pptx
@@ -13243,7 +13243,7 @@
         </p:nvSpPr>
         <p:spPr>
           <a:xfrm>
-            <a:off x="320982" y="1275371"/>
+            <a:off x="2542542" y="3429000"/>
             <a:ext cx="3343561" cy="666078"/>
           </a:xfrm>
           <a:prstGeom prst="rect">
@@ -13736,6 +13736,79 @@
           </a:lstStyle>
           <a:p>
             <a:endParaRPr lang="en-GB" sz="2000" dirty="0"/>
+          </a:p>
+        </p:txBody>
+      </p:sp>
+      <p:sp>
+        <p:nvSpPr>
+          <p:cNvPr id="2" name="TextBox 1">
+            <a:extLst>
+              <a:ext uri="{FF2B5EF4-FFF2-40B4-BE49-F238E27FC236}">
+                <a16:creationId xmlns:a16="http://schemas.microsoft.com/office/drawing/2014/main" id="{8BF57987-3410-A951-64C8-08597D03FE3D}"/>
+              </a:ext>
+            </a:extLst>
+          </p:cNvPr>
+          <p:cNvSpPr txBox="1"/>
+          <p:nvPr/>
+        </p:nvSpPr>
+        <p:spPr>
+          <a:xfrm>
+            <a:off x="647965" y="2255086"/>
+            <a:ext cx="10476277" cy="369332"/>
+          </a:xfrm>
+          <a:prstGeom prst="rect">
+            <a:avLst/>
+          </a:prstGeom>
+          <a:noFill/>
+        </p:spPr>
+        <p:txBody>
+          <a:bodyPr wrap="square" rtlCol="0">
+            <a:spAutoFit/>
+          </a:bodyPr>
+          <a:lstStyle/>
+          <a:p>
+            <a:r>
+              <a:rPr lang="en-IN" dirty="0">
+                <a:hlinkClick r:id="rId3" action="ppaction://hlinkfile"/>
+              </a:rPr>
+              <a:t>https://github.com/nikhilmadaan2024-star/Seasonal-Agriculture-Performance-Analysis.git</a:t>
+            </a:r>
+            <a:endParaRPr lang="en-IN" dirty="0"/>
+          </a:p>
+        </p:txBody>
+      </p:sp>
+      <p:sp>
+        <p:nvSpPr>
+          <p:cNvPr id="3" name="TextBox 2">
+            <a:extLst>
+              <a:ext uri="{FF2B5EF4-FFF2-40B4-BE49-F238E27FC236}">
+                <a16:creationId xmlns:a16="http://schemas.microsoft.com/office/drawing/2014/main" id="{A90A60C9-EBF2-3F75-E00D-60D317B4F49C}"/>
+              </a:ext>
+            </a:extLst>
+          </p:cNvPr>
+          <p:cNvSpPr txBox="1"/>
+          <p:nvPr/>
+        </p:nvSpPr>
+        <p:spPr>
+          <a:xfrm>
+            <a:off x="541175" y="1330557"/>
+            <a:ext cx="9589869" cy="369332"/>
+          </a:xfrm>
+          <a:prstGeom prst="rect">
+            <a:avLst/>
+          </a:prstGeom>
+          <a:noFill/>
+        </p:spPr>
+        <p:txBody>
+          <a:bodyPr wrap="none" rtlCol="0">
+            <a:spAutoFit/>
+          </a:bodyPr>
+          <a:lstStyle/>
+          <a:p>
+            <a:r>
+              <a:rPr lang="en-IN" dirty="0"/>
+              <a:t>https://github.com/nikhilmadaan2024-star/Seasonal-Agriculture-Performance-Analysis.git</a:t>
+            </a:r>
           </a:p>
         </p:txBody>
       </p:sp>
@@ -25914,12 +25987,12 @@
 </file>
 
 <file path=customXml/item1.xml><?xml version="1.0" encoding="utf-8"?>
-<p:properties xmlns:p="http://schemas.microsoft.com/office/2006/metadata/properties" xmlns:xsi="http://www.w3.org/2001/XMLSchema-instance" xmlns:pc="http://schemas.microsoft.com/office/infopath/2007/PartnerControls">
-  <documentManagement>
-    <Status xmlns="71af3243-3dd4-4a8d-8c0d-dd76da1f02a5">Not started</Status>
-    <MediaServiceKeyPoints xmlns="71af3243-3dd4-4a8d-8c0d-dd76da1f02a5" xsi:nil="true"/>
-  </documentManagement>
-</p:properties>
+<?mso-contentType ?>
+<FormTemplates xmlns="http://schemas.microsoft.com/sharepoint/v3/contenttype/forms">
+  <Display>DocumentLibraryForm</Display>
+  <Edit>DocumentLibraryForm</Edit>
+  <New>DocumentLibraryForm</New>
+</FormTemplates>
 </file>
 
 <file path=customXml/item2.xml><?xml version="1.0" encoding="utf-8"?>
@@ -26144,20 +26217,18 @@
 </file>
 
 <file path=customXml/item3.xml><?xml version="1.0" encoding="utf-8"?>
-<?mso-contentType ?>
-<FormTemplates xmlns="http://schemas.microsoft.com/sharepoint/v3/contenttype/forms">
-  <Display>DocumentLibraryForm</Display>
-  <Edit>DocumentLibraryForm</Edit>
-  <New>DocumentLibraryForm</New>
-</FormTemplates>
+<p:properties xmlns:p="http://schemas.microsoft.com/office/2006/metadata/properties" xmlns:xsi="http://www.w3.org/2001/XMLSchema-instance" xmlns:pc="http://schemas.microsoft.com/office/infopath/2007/PartnerControls">
+  <documentManagement>
+    <Status xmlns="71af3243-3dd4-4a8d-8c0d-dd76da1f02a5">Not started</Status>
+    <MediaServiceKeyPoints xmlns="71af3243-3dd4-4a8d-8c0d-dd76da1f02a5" xsi:nil="true"/>
+  </documentManagement>
+</p:properties>
 </file>
 
 <file path=customXml/itemProps1.xml><?xml version="1.0" encoding="utf-8"?>
-<ds:datastoreItem xmlns:ds="http://schemas.openxmlformats.org/officeDocument/2006/customXml" ds:itemID="{4DEA9014-ED64-4558-B1E1-D03F0EE32BEB}">
+<ds:datastoreItem xmlns:ds="http://schemas.openxmlformats.org/officeDocument/2006/customXml" ds:itemID="{05D99ABA-76CE-4A8E-B5F0-C051B96628DE}">
   <ds:schemaRefs>
-    <ds:schemaRef ds:uri="http://schemas.microsoft.com/office/2006/metadata/properties"/>
-    <ds:schemaRef ds:uri="http://schemas.microsoft.com/office/infopath/2007/PartnerControls"/>
-    <ds:schemaRef ds:uri="71af3243-3dd4-4a8d-8c0d-dd76da1f02a5"/>
+    <ds:schemaRef ds:uri="http://schemas.microsoft.com/sharepoint/v3/contenttype/forms"/>
   </ds:schemaRefs>
 </ds:datastoreItem>
 </file>
@@ -26182,9 +26253,11 @@
 </file>
 
 <file path=customXml/itemProps3.xml><?xml version="1.0" encoding="utf-8"?>
-<ds:datastoreItem xmlns:ds="http://schemas.openxmlformats.org/officeDocument/2006/customXml" ds:itemID="{05D99ABA-76CE-4A8E-B5F0-C051B96628DE}">
+<ds:datastoreItem xmlns:ds="http://schemas.openxmlformats.org/officeDocument/2006/customXml" ds:itemID="{4DEA9014-ED64-4558-B1E1-D03F0EE32BEB}">
   <ds:schemaRefs>
-    <ds:schemaRef ds:uri="http://schemas.microsoft.com/sharepoint/v3/contenttype/forms"/>
+    <ds:schemaRef ds:uri="http://schemas.microsoft.com/office/2006/metadata/properties"/>
+    <ds:schemaRef ds:uri="http://schemas.microsoft.com/office/infopath/2007/PartnerControls"/>
+    <ds:schemaRef ds:uri="71af3243-3dd4-4a8d-8c0d-dd76da1f02a5"/>
   </ds:schemaRefs>
 </ds:datastoreItem>
 </file>